--- a/Materjalid/Day8 SQL/8-paev-andmetarkus-esitlus.pptx
+++ b/Materjalid/Day8 SQL/8-paev-andmetarkus-esitlus.pptx
@@ -2119,7 +2119,7 @@
           <a:p>
             <a:fld id="{B3F28435-DCAB-49E5-8B98-BBB31E071E6A}" type="datetimeFigureOut">
               <a:rPr lang="en-GB" smtClean="0"/>
-              <a:t>09/09/2026</a:t>
+              <a:t>02/10/2026</a:t>
             </a:fld>
             <a:endParaRPr lang="en-GB"/>
           </a:p>
@@ -3712,7 +3712,7 @@
           <a:p>
             <a:fld id="{5BCAD085-E8A6-8845-BD4E-CB4CCA059FC4}" type="datetimeFigureOut">
               <a:rPr lang="en-US" smtClean="0"/>
-              <a:t>9/9/2026</a:t>
+              <a:t>10/2/2026</a:t>
             </a:fld>
             <a:endParaRPr lang="en-US"/>
           </a:p>
@@ -3880,7 +3880,7 @@
           <a:p>
             <a:fld id="{5BCAD085-E8A6-8845-BD4E-CB4CCA059FC4}" type="datetimeFigureOut">
               <a:rPr lang="en-US" smtClean="0"/>
-              <a:t>9/9/2026</a:t>
+              <a:t>10/2/2026</a:t>
             </a:fld>
             <a:endParaRPr lang="en-US"/>
           </a:p>
@@ -4058,7 +4058,7 @@
           <a:p>
             <a:fld id="{5BCAD085-E8A6-8845-BD4E-CB4CCA059FC4}" type="datetimeFigureOut">
               <a:rPr lang="en-US" smtClean="0"/>
-              <a:t>9/9/2026</a:t>
+              <a:t>10/2/2026</a:t>
             </a:fld>
             <a:endParaRPr lang="en-US"/>
           </a:p>
@@ -4958,7 +4958,7 @@
           <a:p>
             <a:fld id="{5BCAD085-E8A6-8845-BD4E-CB4CCA059FC4}" type="datetimeFigureOut">
               <a:rPr lang="en-US" smtClean="0"/>
-              <a:t>9/9/2026</a:t>
+              <a:t>10/2/2026</a:t>
             </a:fld>
             <a:endParaRPr lang="en-US"/>
           </a:p>
@@ -5203,7 +5203,7 @@
           <a:p>
             <a:fld id="{5BCAD085-E8A6-8845-BD4E-CB4CCA059FC4}" type="datetimeFigureOut">
               <a:rPr lang="en-US" smtClean="0"/>
-              <a:t>9/9/2026</a:t>
+              <a:t>10/2/2026</a:t>
             </a:fld>
             <a:endParaRPr lang="en-US"/>
           </a:p>
@@ -5488,7 +5488,7 @@
           <a:p>
             <a:fld id="{5BCAD085-E8A6-8845-BD4E-CB4CCA059FC4}" type="datetimeFigureOut">
               <a:rPr lang="en-US" smtClean="0"/>
-              <a:t>9/9/2026</a:t>
+              <a:t>10/2/2026</a:t>
             </a:fld>
             <a:endParaRPr lang="en-US"/>
           </a:p>
@@ -5907,7 +5907,7 @@
           <a:p>
             <a:fld id="{5BCAD085-E8A6-8845-BD4E-CB4CCA059FC4}" type="datetimeFigureOut">
               <a:rPr lang="en-US" smtClean="0"/>
-              <a:t>9/9/2026</a:t>
+              <a:t>10/2/2026</a:t>
             </a:fld>
             <a:endParaRPr lang="en-US"/>
           </a:p>
@@ -6024,7 +6024,7 @@
           <a:p>
             <a:fld id="{5BCAD085-E8A6-8845-BD4E-CB4CCA059FC4}" type="datetimeFigureOut">
               <a:rPr lang="en-US" smtClean="0"/>
-              <a:t>9/9/2026</a:t>
+              <a:t>10/2/2026</a:t>
             </a:fld>
             <a:endParaRPr lang="en-US"/>
           </a:p>
@@ -6119,7 +6119,7 @@
           <a:p>
             <a:fld id="{5BCAD085-E8A6-8845-BD4E-CB4CCA059FC4}" type="datetimeFigureOut">
               <a:rPr lang="en-US" smtClean="0"/>
-              <a:t>9/9/2026</a:t>
+              <a:t>10/2/2026</a:t>
             </a:fld>
             <a:endParaRPr lang="en-US"/>
           </a:p>
@@ -6394,7 +6394,7 @@
           <a:p>
             <a:fld id="{5BCAD085-E8A6-8845-BD4E-CB4CCA059FC4}" type="datetimeFigureOut">
               <a:rPr lang="en-US" smtClean="0"/>
-              <a:t>9/9/2026</a:t>
+              <a:t>10/2/2026</a:t>
             </a:fld>
             <a:endParaRPr lang="en-US"/>
           </a:p>
@@ -6646,7 +6646,7 @@
           <a:p>
             <a:fld id="{5BCAD085-E8A6-8845-BD4E-CB4CCA059FC4}" type="datetimeFigureOut">
               <a:rPr lang="en-US" smtClean="0"/>
-              <a:t>9/9/2026</a:t>
+              <a:t>10/2/2026</a:t>
             </a:fld>
             <a:endParaRPr lang="en-US"/>
           </a:p>
@@ -6857,7 +6857,7 @@
           <a:p>
             <a:fld id="{5BCAD085-E8A6-8845-BD4E-CB4CCA059FC4}" type="datetimeFigureOut">
               <a:rPr lang="en-US" smtClean="0"/>
-              <a:t>9/9/2026</a:t>
+              <a:t>10/2/2026</a:t>
             </a:fld>
             <a:endParaRPr lang="en-US"/>
           </a:p>
@@ -17454,50 +17454,6 @@
       </p:grpSpPr>
       <p:sp>
         <p:nvSpPr>
-          <p:cNvPr id="2" name="Rectangle 1"/>
-          <p:cNvSpPr/>
-          <p:nvPr/>
-        </p:nvSpPr>
-        <p:spPr>
-          <a:xfrm>
-            <a:off x="0" y="0"/>
-            <a:ext cx="12191695" cy="6858000"/>
-          </a:xfrm>
-          <a:prstGeom prst="rect">
-            <a:avLst/>
-          </a:prstGeom>
-          <a:solidFill>
-            <a:srgbClr val="F7F9FC"/>
-          </a:solidFill>
-          <a:ln>
-            <a:noFill/>
-          </a:ln>
-        </p:spPr>
-        <p:style>
-          <a:lnRef idx="1">
-            <a:schemeClr val="accent1"/>
-          </a:lnRef>
-          <a:fillRef idx="3">
-            <a:schemeClr val="accent1"/>
-          </a:fillRef>
-          <a:effectRef idx="2">
-            <a:schemeClr val="accent1"/>
-          </a:effectRef>
-          <a:fontRef idx="minor">
-            <a:schemeClr val="lt1"/>
-          </a:fontRef>
-        </p:style>
-        <p:txBody>
-          <a:bodyPr rtlCol="0" anchor="ctr"/>
-          <a:lstStyle/>
-          <a:p>
-            <a:pPr algn="ctr"/>
-            <a:endParaRPr/>
-          </a:p>
-        </p:txBody>
-      </p:sp>
-      <p:sp>
-        <p:nvSpPr>
           <p:cNvPr id="3" name="Rectangle 2"/>
           <p:cNvSpPr/>
           <p:nvPr/>
@@ -20207,50 +20163,6 @@
       </p:grpSpPr>
       <p:sp>
         <p:nvSpPr>
-          <p:cNvPr id="2" name="Rectangle 1"/>
-          <p:cNvSpPr/>
-          <p:nvPr/>
-        </p:nvSpPr>
-        <p:spPr>
-          <a:xfrm>
-            <a:off x="0" y="0"/>
-            <a:ext cx="12191695" cy="6858000"/>
-          </a:xfrm>
-          <a:prstGeom prst="rect">
-            <a:avLst/>
-          </a:prstGeom>
-          <a:solidFill>
-            <a:srgbClr val="F7F9FC"/>
-          </a:solidFill>
-          <a:ln>
-            <a:noFill/>
-          </a:ln>
-        </p:spPr>
-        <p:style>
-          <a:lnRef idx="1">
-            <a:schemeClr val="accent1"/>
-          </a:lnRef>
-          <a:fillRef idx="3">
-            <a:schemeClr val="accent1"/>
-          </a:fillRef>
-          <a:effectRef idx="2">
-            <a:schemeClr val="accent1"/>
-          </a:effectRef>
-          <a:fontRef idx="minor">
-            <a:schemeClr val="lt1"/>
-          </a:fontRef>
-        </p:style>
-        <p:txBody>
-          <a:bodyPr rtlCol="0" anchor="ctr"/>
-          <a:lstStyle/>
-          <a:p>
-            <a:pPr algn="ctr"/>
-            <a:endParaRPr/>
-          </a:p>
-        </p:txBody>
-      </p:sp>
-      <p:sp>
-        <p:nvSpPr>
           <p:cNvPr id="3" name="Rectangle 2"/>
           <p:cNvSpPr/>
           <p:nvPr/>
@@ -24321,50 +24233,6 @@
           <a:chExt cx="0" cy="0"/>
         </a:xfrm>
       </p:grpSpPr>
-      <p:sp>
-        <p:nvSpPr>
-          <p:cNvPr id="2" name="Rectangle 1"/>
-          <p:cNvSpPr/>
-          <p:nvPr/>
-        </p:nvSpPr>
-        <p:spPr>
-          <a:xfrm>
-            <a:off x="0" y="0"/>
-            <a:ext cx="12191695" cy="6858000"/>
-          </a:xfrm>
-          <a:prstGeom prst="rect">
-            <a:avLst/>
-          </a:prstGeom>
-          <a:solidFill>
-            <a:srgbClr val="F7F9FC"/>
-          </a:solidFill>
-          <a:ln>
-            <a:noFill/>
-          </a:ln>
-        </p:spPr>
-        <p:style>
-          <a:lnRef idx="1">
-            <a:schemeClr val="accent1"/>
-          </a:lnRef>
-          <a:fillRef idx="3">
-            <a:schemeClr val="accent1"/>
-          </a:fillRef>
-          <a:effectRef idx="2">
-            <a:schemeClr val="accent1"/>
-          </a:effectRef>
-          <a:fontRef idx="minor">
-            <a:schemeClr val="lt1"/>
-          </a:fontRef>
-        </p:style>
-        <p:txBody>
-          <a:bodyPr rtlCol="0" anchor="ctr"/>
-          <a:lstStyle/>
-          <a:p>
-            <a:pPr algn="ctr"/>
-            <a:endParaRPr/>
-          </a:p>
-        </p:txBody>
-      </p:sp>
       <p:sp>
         <p:nvSpPr>
           <p:cNvPr id="3" name="Rectangle 2"/>
@@ -27894,50 +27762,6 @@
           <a:chExt cx="0" cy="0"/>
         </a:xfrm>
       </p:grpSpPr>
-      <p:sp>
-        <p:nvSpPr>
-          <p:cNvPr id="2" name="Rectangle 1"/>
-          <p:cNvSpPr/>
-          <p:nvPr/>
-        </p:nvSpPr>
-        <p:spPr>
-          <a:xfrm>
-            <a:off x="0" y="0"/>
-            <a:ext cx="12191695" cy="6858000"/>
-          </a:xfrm>
-          <a:prstGeom prst="rect">
-            <a:avLst/>
-          </a:prstGeom>
-          <a:solidFill>
-            <a:srgbClr val="F7F9FC"/>
-          </a:solidFill>
-          <a:ln>
-            <a:noFill/>
-          </a:ln>
-        </p:spPr>
-        <p:style>
-          <a:lnRef idx="1">
-            <a:schemeClr val="accent1"/>
-          </a:lnRef>
-          <a:fillRef idx="3">
-            <a:schemeClr val="accent1"/>
-          </a:fillRef>
-          <a:effectRef idx="2">
-            <a:schemeClr val="accent1"/>
-          </a:effectRef>
-          <a:fontRef idx="minor">
-            <a:schemeClr val="lt1"/>
-          </a:fontRef>
-        </p:style>
-        <p:txBody>
-          <a:bodyPr rtlCol="0" anchor="ctr"/>
-          <a:lstStyle/>
-          <a:p>
-            <a:pPr algn="ctr"/>
-            <a:endParaRPr/>
-          </a:p>
-        </p:txBody>
-      </p:sp>
       <p:sp>
         <p:nvSpPr>
           <p:cNvPr id="3" name="Rectangle 2"/>
@@ -34205,50 +34029,6 @@
       </p:grpSpPr>
       <p:sp>
         <p:nvSpPr>
-          <p:cNvPr id="2" name="Rectangle 1"/>
-          <p:cNvSpPr/>
-          <p:nvPr/>
-        </p:nvSpPr>
-        <p:spPr>
-          <a:xfrm>
-            <a:off x="0" y="0"/>
-            <a:ext cx="12191695" cy="6858000"/>
-          </a:xfrm>
-          <a:prstGeom prst="rect">
-            <a:avLst/>
-          </a:prstGeom>
-          <a:solidFill>
-            <a:srgbClr val="F7F9FC"/>
-          </a:solidFill>
-          <a:ln>
-            <a:noFill/>
-          </a:ln>
-        </p:spPr>
-        <p:style>
-          <a:lnRef idx="1">
-            <a:schemeClr val="accent1"/>
-          </a:lnRef>
-          <a:fillRef idx="3">
-            <a:schemeClr val="accent1"/>
-          </a:fillRef>
-          <a:effectRef idx="2">
-            <a:schemeClr val="accent1"/>
-          </a:effectRef>
-          <a:fontRef idx="minor">
-            <a:schemeClr val="lt1"/>
-          </a:fontRef>
-        </p:style>
-        <p:txBody>
-          <a:bodyPr rtlCol="0" anchor="ctr"/>
-          <a:lstStyle/>
-          <a:p>
-            <a:pPr algn="ctr"/>
-            <a:endParaRPr/>
-          </a:p>
-        </p:txBody>
-      </p:sp>
-      <p:sp>
-        <p:nvSpPr>
           <p:cNvPr id="3" name="Rectangle 2"/>
           <p:cNvSpPr/>
           <p:nvPr/>
@@ -36614,50 +36394,6 @@
       </p:grpSpPr>
       <p:sp>
         <p:nvSpPr>
-          <p:cNvPr id="2" name="Rectangle 1"/>
-          <p:cNvSpPr/>
-          <p:nvPr/>
-        </p:nvSpPr>
-        <p:spPr>
-          <a:xfrm>
-            <a:off x="0" y="0"/>
-            <a:ext cx="12191695" cy="6858000"/>
-          </a:xfrm>
-          <a:prstGeom prst="rect">
-            <a:avLst/>
-          </a:prstGeom>
-          <a:solidFill>
-            <a:srgbClr val="F7F9FC"/>
-          </a:solidFill>
-          <a:ln>
-            <a:noFill/>
-          </a:ln>
-        </p:spPr>
-        <p:style>
-          <a:lnRef idx="1">
-            <a:schemeClr val="accent1"/>
-          </a:lnRef>
-          <a:fillRef idx="3">
-            <a:schemeClr val="accent1"/>
-          </a:fillRef>
-          <a:effectRef idx="2">
-            <a:schemeClr val="accent1"/>
-          </a:effectRef>
-          <a:fontRef idx="minor">
-            <a:schemeClr val="lt1"/>
-          </a:fontRef>
-        </p:style>
-        <p:txBody>
-          <a:bodyPr rtlCol="0" anchor="ctr"/>
-          <a:lstStyle/>
-          <a:p>
-            <a:pPr algn="ctr"/>
-            <a:endParaRPr/>
-          </a:p>
-        </p:txBody>
-      </p:sp>
-      <p:sp>
-        <p:nvSpPr>
           <p:cNvPr id="3" name="Rectangle 2"/>
           <p:cNvSpPr/>
           <p:nvPr/>
@@ -46582,50 +46318,6 @@
       </p:grpSpPr>
       <p:sp>
         <p:nvSpPr>
-          <p:cNvPr id="2" name="Rectangle 1"/>
-          <p:cNvSpPr/>
-          <p:nvPr/>
-        </p:nvSpPr>
-        <p:spPr>
-          <a:xfrm>
-            <a:off x="0" y="0"/>
-            <a:ext cx="12191695" cy="6858000"/>
-          </a:xfrm>
-          <a:prstGeom prst="rect">
-            <a:avLst/>
-          </a:prstGeom>
-          <a:solidFill>
-            <a:srgbClr val="F7F9FC"/>
-          </a:solidFill>
-          <a:ln>
-            <a:noFill/>
-          </a:ln>
-        </p:spPr>
-        <p:style>
-          <a:lnRef idx="1">
-            <a:schemeClr val="accent1"/>
-          </a:lnRef>
-          <a:fillRef idx="3">
-            <a:schemeClr val="accent1"/>
-          </a:fillRef>
-          <a:effectRef idx="2">
-            <a:schemeClr val="accent1"/>
-          </a:effectRef>
-          <a:fontRef idx="minor">
-            <a:schemeClr val="lt1"/>
-          </a:fontRef>
-        </p:style>
-        <p:txBody>
-          <a:bodyPr rtlCol="0" anchor="ctr"/>
-          <a:lstStyle/>
-          <a:p>
-            <a:pPr algn="ctr"/>
-            <a:endParaRPr/>
-          </a:p>
-        </p:txBody>
-      </p:sp>
-      <p:sp>
-        <p:nvSpPr>
           <p:cNvPr id="3" name="Rectangle 2"/>
           <p:cNvSpPr/>
           <p:nvPr/>
@@ -47179,50 +46871,6 @@
           <a:chExt cx="0" cy="0"/>
         </a:xfrm>
       </p:grpSpPr>
-      <p:sp>
-        <p:nvSpPr>
-          <p:cNvPr id="2" name="Rectangle 1"/>
-          <p:cNvSpPr/>
-          <p:nvPr/>
-        </p:nvSpPr>
-        <p:spPr>
-          <a:xfrm>
-            <a:off x="0" y="0"/>
-            <a:ext cx="12191695" cy="6858000"/>
-          </a:xfrm>
-          <a:prstGeom prst="rect">
-            <a:avLst/>
-          </a:prstGeom>
-          <a:solidFill>
-            <a:srgbClr val="F7F9FC"/>
-          </a:solidFill>
-          <a:ln>
-            <a:noFill/>
-          </a:ln>
-        </p:spPr>
-        <p:style>
-          <a:lnRef idx="1">
-            <a:schemeClr val="accent1"/>
-          </a:lnRef>
-          <a:fillRef idx="3">
-            <a:schemeClr val="accent1"/>
-          </a:fillRef>
-          <a:effectRef idx="2">
-            <a:schemeClr val="accent1"/>
-          </a:effectRef>
-          <a:fontRef idx="minor">
-            <a:schemeClr val="lt1"/>
-          </a:fontRef>
-        </p:style>
-        <p:txBody>
-          <a:bodyPr rtlCol="0" anchor="ctr"/>
-          <a:lstStyle/>
-          <a:p>
-            <a:pPr algn="ctr"/>
-            <a:endParaRPr/>
-          </a:p>
-        </p:txBody>
-      </p:sp>
       <p:sp>
         <p:nvSpPr>
           <p:cNvPr id="3" name="Rectangle 2"/>
@@ -47971,50 +47619,6 @@
           <a:chExt cx="0" cy="0"/>
         </a:xfrm>
       </p:grpSpPr>
-      <p:sp>
-        <p:nvSpPr>
-          <p:cNvPr id="2" name="Rectangle 1"/>
-          <p:cNvSpPr/>
-          <p:nvPr/>
-        </p:nvSpPr>
-        <p:spPr>
-          <a:xfrm>
-            <a:off x="0" y="0"/>
-            <a:ext cx="12191695" cy="6858000"/>
-          </a:xfrm>
-          <a:prstGeom prst="rect">
-            <a:avLst/>
-          </a:prstGeom>
-          <a:solidFill>
-            <a:srgbClr val="F7F9FC"/>
-          </a:solidFill>
-          <a:ln>
-            <a:noFill/>
-          </a:ln>
-        </p:spPr>
-        <p:style>
-          <a:lnRef idx="1">
-            <a:schemeClr val="accent1"/>
-          </a:lnRef>
-          <a:fillRef idx="3">
-            <a:schemeClr val="accent1"/>
-          </a:fillRef>
-          <a:effectRef idx="2">
-            <a:schemeClr val="accent1"/>
-          </a:effectRef>
-          <a:fontRef idx="minor">
-            <a:schemeClr val="lt1"/>
-          </a:fontRef>
-        </p:style>
-        <p:txBody>
-          <a:bodyPr rtlCol="0" anchor="ctr"/>
-          <a:lstStyle/>
-          <a:p>
-            <a:pPr algn="ctr"/>
-            <a:endParaRPr/>
-          </a:p>
-        </p:txBody>
-      </p:sp>
       <p:sp>
         <p:nvSpPr>
           <p:cNvPr id="3" name="Rectangle 2"/>
